--- a/decks/weekly-2026-W34.pptx
+++ b/decks/weekly-2026-W34.pptx
@@ -3303,7 +3303,7 @@
                 </a:solidFill>
                 <a:latin typeface="Arial"/>
               </a:rPr>
-              <a:t>122 units through 6 steps this week, across 128 runs.</a:t>
+              <a:t>142 units through 7 steps this week, across 160 runs.</a:t>
             </a:r>
           </a:p>
           <a:p>
@@ -4089,7 +4089,7 @@
                 </a:solidFill>
                 <a:latin typeface="Arial"/>
               </a:rPr>
-              <a:t>  51 units</a:t>
+              <a:t>  67 units</a:t>
             </a:r>
           </a:p>
         </p:txBody>
@@ -4183,7 +4183,7 @@
                 </a:solidFill>
                 <a:latin typeface="Arial"/>
               </a:rPr>
-              <a:t>FAT 1u · SFT 1u</a:t>
+              <a:t>FAT 2u · SFT 2u</a:t>
             </a:r>
             <a:r>
               <a:rPr sz="800" b="0">
@@ -4239,7 +4239,7 @@
                 </a:solidFill>
                 <a:latin typeface="Arial"/>
               </a:rPr>
-              <a:t>1 unit</a:t>
+              <a:t>2 units</a:t>
             </a:r>
             <a:r>
               <a:rPr sz="800" b="0">
@@ -4477,7 +4477,7 @@
                 </a:solidFill>
                 <a:latin typeface="Arial"/>
               </a:rPr>
-              <a:t>122 units</a:t>
+              <a:t>142 units</a:t>
             </a:r>
           </a:p>
           <a:p>
@@ -4493,7 +4493,7 @@
                 </a:solidFill>
                 <a:latin typeface="Arial"/>
               </a:rPr>
-              <a:t>128 runs across 6 steps</a:t>
+              <a:t>160 runs across 7 steps</a:t>
             </a:r>
           </a:p>
         </p:txBody>
@@ -4564,7 +4564,7 @@
                 </a:solidFill>
                 <a:latin typeface="Arial"/>
               </a:rPr>
-              <a:t>A count means no yield is reported. L10 FAT, L10 SFT, L10 RIN, L10 2U are chassis and rack level and in bring-up — a percentage over three units swings 33 points on one of them.</a:t>
+              <a:t>A count means no yield is reported. L10 FAT, L10 SFT, L10 RIN, L10 2U, L11 Provision are chassis and rack level and in bring-up — a percentage over three units swings 33 points on one of them.</a:t>
             </a:r>
           </a:p>
           <a:p>
@@ -5623,7 +5623,7 @@
                 </a:solidFill>
                 <a:latin typeface="Arial"/>
               </a:rPr>
-              <a:t>51</a:t>
+              <a:t>67</a:t>
             </a:r>
           </a:p>
         </p:txBody>
@@ -5662,7 +5662,7 @@
                 </a:solidFill>
                 <a:latin typeface="Arial"/>
               </a:rPr>
-              <a:t>51</a:t>
+              <a:t>67</a:t>
             </a:r>
           </a:p>
         </p:txBody>
@@ -5740,7 +5740,7 @@
                 </a:solidFill>
                 <a:latin typeface="Arial"/>
               </a:rPr>
-              <a:t>82.4%</a:t>
+              <a:t>70.1%</a:t>
             </a:r>
           </a:p>
         </p:txBody>
@@ -5795,7 +5795,7 @@
                 </a:solidFill>
                 <a:latin typeface="Arial"/>
               </a:rPr>
-              <a:t>0 of 51 units re-run</a:t>
+              <a:t>0 of 67 units re-run</a:t>
             </a:r>
           </a:p>
         </p:txBody>
@@ -5921,7 +5921,7 @@
                 </a:solidFill>
                 <a:latin typeface="Arial"/>
               </a:rPr>
-              <a:t>1</a:t>
+              <a:t>2</a:t>
             </a:r>
           </a:p>
         </p:txBody>
@@ -5960,7 +5960,7 @@
                 </a:solidFill>
                 <a:latin typeface="Arial"/>
               </a:rPr>
-              <a:t>2</a:t>
+              <a:t>7</a:t>
             </a:r>
           </a:p>
         </p:txBody>
@@ -6219,7 +6219,7 @@
                 </a:solidFill>
                 <a:latin typeface="Arial"/>
               </a:rPr>
-              <a:t>1</a:t>
+              <a:t>2</a:t>
             </a:r>
           </a:p>
         </p:txBody>
@@ -6258,7 +6258,7 @@
                 </a:solidFill>
                 <a:latin typeface="Arial"/>
               </a:rPr>
-              <a:t>1</a:t>
+              <a:t>5</a:t>
             </a:r>
           </a:p>
         </p:txBody>
@@ -6430,7 +6430,7 @@
                 </a:solidFill>
                 <a:latin typeface="Courier New"/>
               </a:rPr>
-              <a:t>BmcCheck</a:t>
+              <a:t>SohuPowerVirusMultiChipTestCase</a:t>
             </a:r>
           </a:p>
         </p:txBody>
@@ -6815,7 +6815,7 @@
                 </a:solidFill>
                 <a:latin typeface="Arial"/>
               </a:rPr>
-              <a:t>1</a:t>
+              <a:t>2</a:t>
             </a:r>
           </a:p>
         </p:txBody>
@@ -6854,7 +6854,7 @@
                 </a:solidFill>
                 <a:latin typeface="Arial"/>
               </a:rPr>
-              <a:t>6</a:t>
+              <a:t>10</a:t>
             </a:r>
           </a:p>
         </p:txBody>
@@ -7034,6 +7034,304 @@
       <p:sp>
         <p:nvSpPr>
           <p:cNvPr id="59" name="TextBox 58"/>
+          <p:cNvSpPr txBox="1"/>
+          <p:nvPr/>
+        </p:nvSpPr>
+        <p:spPr>
+          <a:xfrm>
+            <a:off x="502920" y="5440680"/>
+            <a:ext cx="2194560" cy="365760"/>
+          </a:xfrm>
+          <a:prstGeom prst="rect">
+            <a:avLst/>
+          </a:prstGeom>
+          <a:noFill/>
+        </p:spPr>
+        <p:txBody>
+          <a:bodyPr wrap="square" lIns="0" rIns="0" tIns="0" bIns="0">
+            <a:spAutoFit/>
+          </a:bodyPr>
+          <a:lstStyle/>
+          <a:p>
+            <a:pPr algn="l">
+              <a:spcAft>
+                <a:spcPts val="300"/>
+              </a:spcAft>
+            </a:pPr>
+            <a:r>
+              <a:rPr sz="1300" b="1">
+                <a:solidFill>
+                  <a:srgbClr val="6B6B6B"/>
+                </a:solidFill>
+                <a:latin typeface="Arial"/>
+              </a:rPr>
+              <a:t>L11 Provision</a:t>
+            </a:r>
+            <a:r>
+              <a:rPr sz="900" b="0">
+                <a:solidFill>
+                  <a:srgbClr val="6B6B6B"/>
+                </a:solidFill>
+                <a:latin typeface="Arial"/>
+              </a:rPr>
+              <a:t>  pega5</a:t>
+            </a:r>
+          </a:p>
+        </p:txBody>
+      </p:sp>
+      <p:sp>
+        <p:nvSpPr>
+          <p:cNvPr id="60" name="TextBox 59"/>
+          <p:cNvSpPr txBox="1"/>
+          <p:nvPr/>
+        </p:nvSpPr>
+        <p:spPr>
+          <a:xfrm>
+            <a:off x="2788920" y="5440680"/>
+            <a:ext cx="914400" cy="274320"/>
+          </a:xfrm>
+          <a:prstGeom prst="rect">
+            <a:avLst/>
+          </a:prstGeom>
+          <a:noFill/>
+        </p:spPr>
+        <p:txBody>
+          <a:bodyPr wrap="square" lIns="0" rIns="0" tIns="0" bIns="0">
+            <a:spAutoFit/>
+          </a:bodyPr>
+          <a:lstStyle/>
+          <a:p>
+            <a:pPr algn="l">
+              <a:spcAft>
+                <a:spcPts val="300"/>
+              </a:spcAft>
+            </a:pPr>
+            <a:r>
+              <a:rPr sz="1250" b="0">
+                <a:solidFill>
+                  <a:srgbClr val="6B6B6B"/>
+                </a:solidFill>
+                <a:latin typeface="Arial"/>
+              </a:rPr>
+              <a:t>1</a:t>
+            </a:r>
+          </a:p>
+        </p:txBody>
+      </p:sp>
+      <p:sp>
+        <p:nvSpPr>
+          <p:cNvPr id="61" name="TextBox 60"/>
+          <p:cNvSpPr txBox="1"/>
+          <p:nvPr/>
+        </p:nvSpPr>
+        <p:spPr>
+          <a:xfrm>
+            <a:off x="3794760" y="5440680"/>
+            <a:ext cx="1005840" cy="274320"/>
+          </a:xfrm>
+          <a:prstGeom prst="rect">
+            <a:avLst/>
+          </a:prstGeom>
+          <a:noFill/>
+        </p:spPr>
+        <p:txBody>
+          <a:bodyPr wrap="square" lIns="0" rIns="0" tIns="0" bIns="0">
+            <a:spAutoFit/>
+          </a:bodyPr>
+          <a:lstStyle/>
+          <a:p>
+            <a:pPr algn="l">
+              <a:spcAft>
+                <a:spcPts val="300"/>
+              </a:spcAft>
+            </a:pPr>
+            <a:r>
+              <a:rPr sz="1250" b="0">
+                <a:solidFill>
+                  <a:srgbClr val="6B6B6B"/>
+                </a:solidFill>
+                <a:latin typeface="Arial"/>
+              </a:rPr>
+              <a:t>3</a:t>
+            </a:r>
+          </a:p>
+        </p:txBody>
+      </p:sp>
+      <p:sp>
+        <p:nvSpPr>
+          <p:cNvPr id="62" name="TextBox 61"/>
+          <p:cNvSpPr txBox="1"/>
+          <p:nvPr/>
+        </p:nvSpPr>
+        <p:spPr>
+          <a:xfrm>
+            <a:off x="4892040" y="5440680"/>
+            <a:ext cx="1371600" cy="274320"/>
+          </a:xfrm>
+          <a:prstGeom prst="rect">
+            <a:avLst/>
+          </a:prstGeom>
+          <a:noFill/>
+        </p:spPr>
+        <p:txBody>
+          <a:bodyPr wrap="square" lIns="0" rIns="0" tIns="0" bIns="0">
+            <a:spAutoFit/>
+          </a:bodyPr>
+          <a:lstStyle/>
+          <a:p>
+            <a:pPr algn="l">
+              <a:spcAft>
+                <a:spcPts val="300"/>
+              </a:spcAft>
+            </a:pPr>
+            <a:r>
+              <a:rPr sz="1000" b="0">
+                <a:solidFill>
+                  <a:srgbClr val="6B6B6B"/>
+                </a:solidFill>
+                <a:latin typeface="Arial"/>
+              </a:rPr>
+              <a:t>quantity only</a:t>
+            </a:r>
+          </a:p>
+        </p:txBody>
+      </p:sp>
+      <p:sp>
+        <p:nvSpPr>
+          <p:cNvPr id="63" name="TextBox 62"/>
+          <p:cNvSpPr txBox="1"/>
+          <p:nvPr/>
+        </p:nvSpPr>
+        <p:spPr>
+          <a:xfrm>
+            <a:off x="6400800" y="5440680"/>
+            <a:ext cx="1463040" cy="274320"/>
+          </a:xfrm>
+          <a:prstGeom prst="rect">
+            <a:avLst/>
+          </a:prstGeom>
+          <a:noFill/>
+        </p:spPr>
+        <p:txBody>
+          <a:bodyPr wrap="square" lIns="0" rIns="0" tIns="0" bIns="0">
+            <a:spAutoFit/>
+          </a:bodyPr>
+          <a:lstStyle/>
+          <a:p>
+            <a:pPr algn="l">
+              <a:spcAft>
+                <a:spcPts val="300"/>
+              </a:spcAft>
+            </a:pPr>
+            <a:r>
+              <a:rPr sz="1250" b="0">
+                <a:solidFill>
+                  <a:srgbClr val="6B6B6B"/>
+                </a:solidFill>
+                <a:latin typeface="Arial"/>
+              </a:rPr>
+              <a:t>—</a:t>
+            </a:r>
+          </a:p>
+        </p:txBody>
+      </p:sp>
+      <p:sp>
+        <p:nvSpPr>
+          <p:cNvPr id="64" name="TextBox 63"/>
+          <p:cNvSpPr txBox="1"/>
+          <p:nvPr/>
+        </p:nvSpPr>
+        <p:spPr>
+          <a:xfrm>
+            <a:off x="8001000" y="5440680"/>
+            <a:ext cx="1691640" cy="402336"/>
+          </a:xfrm>
+          <a:prstGeom prst="rect">
+            <a:avLst/>
+          </a:prstGeom>
+          <a:noFill/>
+        </p:spPr>
+        <p:txBody>
+          <a:bodyPr wrap="square" lIns="0" rIns="0" tIns="0" bIns="0">
+            <a:spAutoFit/>
+          </a:bodyPr>
+          <a:lstStyle/>
+          <a:p>
+            <a:pPr algn="l">
+              <a:spcAft>
+                <a:spcPts val="0"/>
+              </a:spcAft>
+            </a:pPr>
+            <a:r>
+              <a:rPr sz="1400" b="1">
+                <a:solidFill>
+                  <a:srgbClr val="141414"/>
+                </a:solidFill>
+                <a:latin typeface="Arial"/>
+              </a:rPr>
+              <a:t>—</a:t>
+            </a:r>
+          </a:p>
+          <a:p>
+            <a:pPr algn="l">
+              <a:spcAft>
+                <a:spcPts val="0"/>
+              </a:spcAft>
+            </a:pPr>
+            <a:r>
+              <a:rPr sz="850" b="0">
+                <a:solidFill>
+                  <a:srgbClr val="6B6B6B"/>
+                </a:solidFill>
+                <a:latin typeface="Arial"/>
+              </a:rPr>
+              <a:t>chassis and rack level, in bring-up — quantity only</a:t>
+            </a:r>
+          </a:p>
+        </p:txBody>
+      </p:sp>
+      <p:sp>
+        <p:nvSpPr>
+          <p:cNvPr id="65" name="TextBox 64"/>
+          <p:cNvSpPr txBox="1"/>
+          <p:nvPr/>
+        </p:nvSpPr>
+        <p:spPr>
+          <a:xfrm>
+            <a:off x="9784080" y="5440680"/>
+            <a:ext cx="1920240" cy="402336"/>
+          </a:xfrm>
+          <a:prstGeom prst="rect">
+            <a:avLst/>
+          </a:prstGeom>
+          <a:noFill/>
+        </p:spPr>
+        <p:txBody>
+          <a:bodyPr wrap="square" lIns="0" rIns="0" tIns="0" bIns="0">
+            <a:spAutoFit/>
+          </a:bodyPr>
+          <a:lstStyle/>
+          <a:p>
+            <a:pPr algn="l">
+              <a:spcAft>
+                <a:spcPts val="300"/>
+              </a:spcAft>
+            </a:pPr>
+            <a:r>
+              <a:rPr sz="850" b="0">
+                <a:solidFill>
+                  <a:srgbClr val="6B6B6B"/>
+                </a:solidFill>
+                <a:latin typeface="Courier New"/>
+              </a:rPr>
+              <a:t>ProvisionPdu</a:t>
+            </a:r>
+          </a:p>
+        </p:txBody>
+      </p:sp>
+      <p:sp>
+        <p:nvSpPr>
+          <p:cNvPr id="66" name="TextBox 65"/>
           <p:cNvSpPr txBox="1"/>
           <p:nvPr/>
         </p:nvSpPr>
@@ -7983,7 +8281,7 @@
                 </a:solidFill>
                 <a:latin typeface="Arial"/>
               </a:rPr>
-              <a:t>today 4 units across four steps</a:t>
+              <a:t>today 7 units across four steps</a:t>
             </a:r>
           </a:p>
         </p:txBody>

--- a/decks/weekly-2026-W34.pptx
+++ b/decks/weekly-2026-W34.pptx
@@ -3303,7 +3303,7 @@
                 </a:solidFill>
                 <a:latin typeface="Arial"/>
               </a:rPr>
-              <a:t>142 units through 7 steps this week, across 160 runs.</a:t>
+              <a:t>143 units through 7 steps this week, across 169 runs.</a:t>
             </a:r>
           </a:p>
           <a:p>
@@ -3569,7 +3569,7 @@
                 </a:solidFill>
                 <a:latin typeface="Arial"/>
               </a:rPr>
-              <a:t>0.0% of MLT units and 0.0% of HTT units had to be run again — 0 and 0 units.</a:t>
+              <a:t>6.0% of MLT units and 0.0% of HTT units had to be run again — 4 and 0 units.</a:t>
             </a:r>
           </a:p>
           <a:p>
@@ -4295,7 +4295,7 @@
                 </a:solidFill>
                 <a:latin typeface="Arial"/>
               </a:rPr>
-              <a:t>1 unit</a:t>
+              <a:t>2 units</a:t>
             </a:r>
             <a:r>
               <a:rPr sz="800" b="0">
@@ -4365,6 +4365,93 @@
         <p:spPr>
           <a:xfrm>
             <a:off x="10001548" y="1298448"/>
+            <a:ext cx="2011680" cy="1143000"/>
+          </a:xfrm>
+          <a:prstGeom prst="rect">
+            <a:avLst/>
+          </a:prstGeom>
+          <a:noFill/>
+        </p:spPr>
+        <p:txBody>
+          <a:bodyPr wrap="square" lIns="0" rIns="0" tIns="0" bIns="0">
+            <a:spAutoFit/>
+          </a:bodyPr>
+          <a:lstStyle/>
+          <a:p>
+            <a:pPr algn="l">
+              <a:spcAft>
+                <a:spcPts val="100"/>
+              </a:spcAft>
+            </a:pPr>
+            <a:r>
+              <a:rPr sz="1000" b="0">
+                <a:solidFill>
+                  <a:srgbClr val="6B6B6B"/>
+                </a:solidFill>
+                <a:latin typeface="Arial"/>
+              </a:rPr>
+              <a:t>L6 combined  (MLT × HTT)</a:t>
+            </a:r>
+          </a:p>
+          <a:p>
+            <a:pPr algn="l">
+              <a:spcAft>
+                <a:spcPts val="100"/>
+              </a:spcAft>
+            </a:pPr>
+            <a:r>
+              <a:rPr sz="2600" b="1">
+                <a:solidFill>
+                  <a:srgbClr val="1C62B8"/>
+                </a:solidFill>
+                <a:latin typeface="Arial"/>
+              </a:rPr>
+              <a:t>63.2%</a:t>
+            </a:r>
+          </a:p>
+          <a:p>
+            <a:pPr algn="l">
+              <a:spcAft>
+                <a:spcPts val="100"/>
+              </a:spcAft>
+            </a:pPr>
+            <a:r>
+              <a:rPr sz="1000" b="0">
+                <a:solidFill>
+                  <a:srgbClr val="6B6B6B"/>
+                </a:solidFill>
+                <a:latin typeface="Arial"/>
+              </a:rPr>
+              <a:t>MLT 76.7%   ·   HTT 82.4%</a:t>
+            </a:r>
+          </a:p>
+          <a:p>
+            <a:pPr algn="l">
+              <a:spcAft>
+                <a:spcPts val="100"/>
+              </a:spcAft>
+            </a:pPr>
+            <a:r>
+              <a:rPr sz="900" b="0">
+                <a:solidFill>
+                  <a:srgbClr val="6B6B6B"/>
+                </a:solidFill>
+                <a:latin typeface="Arial"/>
+              </a:rPr>
+              <a:t>a module's chance of clearing both first time</a:t>
+            </a:r>
+          </a:p>
+        </p:txBody>
+      </p:sp>
+      <p:sp>
+        <p:nvSpPr>
+          <p:cNvPr id="16" name="TextBox 15"/>
+          <p:cNvSpPr txBox="1"/>
+          <p:nvPr/>
+        </p:nvSpPr>
+        <p:spPr>
+          <a:xfrm>
+            <a:off x="10001548" y="2697480"/>
             <a:ext cx="2011680" cy="914400"/>
           </a:xfrm>
           <a:prstGeom prst="rect">
@@ -4390,7 +4477,7 @@
                 </a:solidFill>
                 <a:latin typeface="Arial"/>
               </a:rPr>
-              <a:t>Rolled first-pass</a:t>
+              <a:t>Through the line</a:t>
             </a:r>
           </a:p>
           <a:p>
@@ -4400,13 +4487,13 @@
               </a:spcAft>
             </a:pPr>
             <a:r>
-              <a:rPr sz="2600" b="1">
-                <a:solidFill>
-                  <a:srgbClr val="1C62B8"/>
-                </a:solidFill>
-                <a:latin typeface="Arial"/>
-              </a:rPr>
-              <a:t>63.2%</a:t>
+              <a:rPr sz="1800" b="1">
+                <a:solidFill>
+                  <a:srgbClr val="141414"/>
+                </a:solidFill>
+                <a:latin typeface="Arial"/>
+              </a:rPr>
+              <a:t>143 units</a:t>
             </a:r>
           </a:p>
           <a:p>
@@ -4422,78 +4509,7 @@
                 </a:solidFill>
                 <a:latin typeface="Arial"/>
               </a:rPr>
-              <a:t>MLT × HTT</a:t>
-            </a:r>
-          </a:p>
-        </p:txBody>
-      </p:sp>
-      <p:sp>
-        <p:nvSpPr>
-          <p:cNvPr id="16" name="TextBox 15"/>
-          <p:cNvSpPr txBox="1"/>
-          <p:nvPr/>
-        </p:nvSpPr>
-        <p:spPr>
-          <a:xfrm>
-            <a:off x="10001548" y="2487168"/>
-            <a:ext cx="2011680" cy="914400"/>
-          </a:xfrm>
-          <a:prstGeom prst="rect">
-            <a:avLst/>
-          </a:prstGeom>
-          <a:noFill/>
-        </p:spPr>
-        <p:txBody>
-          <a:bodyPr wrap="square" lIns="0" rIns="0" tIns="0" bIns="0">
-            <a:spAutoFit/>
-          </a:bodyPr>
-          <a:lstStyle/>
-          <a:p>
-            <a:pPr algn="l">
-              <a:spcAft>
-                <a:spcPts val="100"/>
-              </a:spcAft>
-            </a:pPr>
-            <a:r>
-              <a:rPr sz="1000" b="0">
-                <a:solidFill>
-                  <a:srgbClr val="6B6B6B"/>
-                </a:solidFill>
-                <a:latin typeface="Arial"/>
-              </a:rPr>
-              <a:t>Through the line</a:t>
-            </a:r>
-          </a:p>
-          <a:p>
-            <a:pPr algn="l">
-              <a:spcAft>
-                <a:spcPts val="100"/>
-              </a:spcAft>
-            </a:pPr>
-            <a:r>
-              <a:rPr sz="1800" b="1">
-                <a:solidFill>
-                  <a:srgbClr val="141414"/>
-                </a:solidFill>
-                <a:latin typeface="Arial"/>
-              </a:rPr>
-              <a:t>142 units</a:t>
-            </a:r>
-          </a:p>
-          <a:p>
-            <a:pPr algn="l">
-              <a:spcAft>
-                <a:spcPts val="100"/>
-              </a:spcAft>
-            </a:pPr>
-            <a:r>
-              <a:rPr sz="900" b="0">
-                <a:solidFill>
-                  <a:srgbClr val="6B6B6B"/>
-                </a:solidFill>
-                <a:latin typeface="Arial"/>
-              </a:rPr>
-              <a:t>160 runs across 7 steps</a:t>
+              <a:t>169 runs across 7 steps</a:t>
             </a:r>
           </a:p>
         </p:txBody>
@@ -4506,8 +4522,8 @@
         </p:nvSpPr>
         <p:spPr>
           <a:xfrm>
-            <a:off x="10001548" y="3520440"/>
-            <a:ext cx="2011680" cy="2651760"/>
+            <a:off x="10001548" y="3703320"/>
+            <a:ext cx="2011680" cy="2468880"/>
           </a:xfrm>
           <a:prstGeom prst="rect">
             <a:avLst/>
@@ -5364,7 +5380,7 @@
                 </a:solidFill>
                 <a:latin typeface="Arial"/>
               </a:rPr>
-              <a:t>67</a:t>
+              <a:t>71</a:t>
             </a:r>
           </a:p>
         </p:txBody>
@@ -5481,7 +5497,7 @@
                 </a:solidFill>
                 <a:latin typeface="Arial"/>
               </a:rPr>
-              <a:t>0.0%</a:t>
+              <a:t>6.0%</a:t>
             </a:r>
           </a:p>
           <a:p>
@@ -5497,7 +5513,7 @@
                 </a:solidFill>
                 <a:latin typeface="Arial"/>
               </a:rPr>
-              <a:t>0 of 67 units re-run</a:t>
+              <a:t>4 of 67 units re-run</a:t>
             </a:r>
           </a:p>
         </p:txBody>
@@ -5960,7 +5976,7 @@
                 </a:solidFill>
                 <a:latin typeface="Arial"/>
               </a:rPr>
-              <a:t>7</a:t>
+              <a:t>8</a:t>
             </a:r>
           </a:p>
         </p:txBody>
@@ -6258,7 +6274,7 @@
                 </a:solidFill>
                 <a:latin typeface="Arial"/>
               </a:rPr>
-              <a:t>5</a:t>
+              <a:t>8</a:t>
             </a:r>
           </a:p>
         </p:txBody>
@@ -6517,7 +6533,7 @@
                 </a:solidFill>
                 <a:latin typeface="Arial"/>
               </a:rPr>
-              <a:t>1</a:t>
+              <a:t>2</a:t>
             </a:r>
           </a:p>
         </p:txBody>
@@ -6556,7 +6572,7 @@
                 </a:solidFill>
                 <a:latin typeface="Arial"/>
               </a:rPr>
-              <a:t>1</a:t>
+              <a:t>2</a:t>
             </a:r>
           </a:p>
         </p:txBody>
@@ -7861,7 +7877,7 @@
                 </a:solidFill>
                 <a:latin typeface="Arial"/>
               </a:rPr>
-              <a:t>today 0.0% at MLT, 0.0% at HTT</a:t>
+              <a:t>today 6.0% at MLT, 0.0% at HTT</a:t>
             </a:r>
           </a:p>
         </p:txBody>
@@ -8281,7 +8297,7 @@
                 </a:solidFill>
                 <a:latin typeface="Arial"/>
               </a:rPr>
-              <a:t>today 7 units across four steps</a:t>
+              <a:t>today 8 units across four steps</a:t>
             </a:r>
           </a:p>
         </p:txBody>

--- a/decks/weekly-2026-W34.pptx
+++ b/decks/weekly-2026-W34.pptx
@@ -3303,7 +3303,7 @@
                 </a:solidFill>
                 <a:latin typeface="Arial"/>
               </a:rPr>
-              <a:t>143 units through 7 steps this week, across 169 runs.</a:t>
+              <a:t>814 units through 8 steps this week, across 1092 runs.</a:t>
             </a:r>
           </a:p>
           <a:p>
@@ -3436,7 +3436,7 @@
                 </a:solidFill>
                 <a:latin typeface="Arial"/>
               </a:rPr>
-              <a:t>First pass 76.7% at MLT and 82.4% at HTT — 63.2% rolled across the two.</a:t>
+              <a:t>First pass 71.2% at MLT and 77.1% at HTT — 26.6% rolled across the two.</a:t>
             </a:r>
           </a:p>
           <a:p>
@@ -3569,7 +3569,7 @@
                 </a:solidFill>
                 <a:latin typeface="Arial"/>
               </a:rPr>
-              <a:t>6.0% of MLT units and 0.0% of HTT units had to be run again — 4 and 0 units.</a:t>
+              <a:t>4.3% of MLT units and 2.3% of HTT units had to be run again — 15 and 6 units.</a:t>
             </a:r>
           </a:p>
           <a:p>
@@ -3865,7 +3865,7 @@
                 </a:solidFill>
                 <a:latin typeface="Arial"/>
               </a:rPr>
-              <a:t>35.3%</a:t>
+              <a:t>32.5%</a:t>
             </a:r>
             <a:r>
               <a:rPr sz="800" b="0">
@@ -4024,7 +4024,7 @@
                 </a:solidFill>
                 <a:latin typeface="Arial"/>
               </a:rPr>
-              <a:t>76.7%</a:t>
+              <a:t>71.2%</a:t>
             </a:r>
             <a:r>
               <a:rPr sz="850" b="0">
@@ -4033,7 +4033,7 @@
                 </a:solidFill>
                 <a:latin typeface="Arial"/>
               </a:rPr>
-              <a:t>  67 units</a:t>
+              <a:t>  350 units</a:t>
             </a:r>
           </a:p>
         </p:txBody>
@@ -4080,7 +4080,7 @@
                 </a:solidFill>
                 <a:latin typeface="Arial"/>
               </a:rPr>
-              <a:t>82.4%</a:t>
+              <a:t>77.1%</a:t>
             </a:r>
             <a:r>
               <a:rPr sz="850" b="0">
@@ -4089,7 +4089,7 @@
                 </a:solidFill>
                 <a:latin typeface="Arial"/>
               </a:rPr>
-              <a:t>  67 units</a:t>
+              <a:t>  265 units</a:t>
             </a:r>
           </a:p>
         </p:txBody>
@@ -4183,7 +4183,7 @@
                 </a:solidFill>
                 <a:latin typeface="Arial"/>
               </a:rPr>
-              <a:t>FAT 2u · SFT 2u</a:t>
+              <a:t>FAT 16u · SFT 14u</a:t>
             </a:r>
             <a:r>
               <a:rPr sz="800" b="0">
@@ -4295,7 +4295,7 @@
                 </a:solidFill>
                 <a:latin typeface="Arial"/>
               </a:rPr>
-              <a:t>2 units</a:t>
+              <a:t>5 units</a:t>
             </a:r>
             <a:r>
               <a:rPr sz="800" b="0">
@@ -4406,7 +4406,7 @@
                 </a:solidFill>
                 <a:latin typeface="Arial"/>
               </a:rPr>
-              <a:t>63.2%</a:t>
+              <a:t>26.6%</a:t>
             </a:r>
           </a:p>
           <a:p>
@@ -4422,7 +4422,7 @@
                 </a:solidFill>
                 <a:latin typeface="Arial"/>
               </a:rPr>
-              <a:t>MLT 76.7%   ·   HTT 82.4%</a:t>
+              <a:t>MLT 71.2%   ·   HTT 77.1%</a:t>
             </a:r>
           </a:p>
           <a:p>
@@ -4493,7 +4493,7 @@
                 </a:solidFill>
                 <a:latin typeface="Arial"/>
               </a:rPr>
-              <a:t>143 units</a:t>
+              <a:t>814 units</a:t>
             </a:r>
           </a:p>
           <a:p>
@@ -4509,7 +4509,7 @@
                 </a:solidFill>
                 <a:latin typeface="Arial"/>
               </a:rPr>
-              <a:t>169 runs across 7 steps</a:t>
+              <a:t>1092 runs across 8 steps</a:t>
             </a:r>
           </a:p>
         </p:txBody>
@@ -4612,7 +4612,7 @@
                 </a:solidFill>
                 <a:latin typeface="Arial"/>
               </a:rPr>
-              <a:t>Source: pega2 – pega5 (ESVM), one row per unit.</a:t>
+              <a:t>Source: pega2, pega6, pega3, pega4, pega5 (ESVM), one row per unit.</a:t>
             </a:r>
           </a:p>
         </p:txBody>
@@ -5089,7 +5089,7 @@
                 </a:solidFill>
                 <a:latin typeface="Arial"/>
               </a:rPr>
-              <a:t>35.3%</a:t>
+              <a:t>32.5%</a:t>
             </a:r>
           </a:p>
         </p:txBody>
@@ -5128,7 +5128,7 @@
                 </a:solidFill>
                 <a:latin typeface="Arial"/>
               </a:rPr>
-              <a:t>Sigurd, as of 2026-08-14</a:t>
+              <a:t>Sigurd, as of 2026-08-21</a:t>
             </a:r>
           </a:p>
         </p:txBody>
@@ -5293,7 +5293,7 @@
                 </a:solidFill>
                 <a:latin typeface="Arial"/>
               </a:rPr>
-              <a:t>MLT</a:t>
+              <a:t>TIM</a:t>
             </a:r>
             <a:r>
               <a:rPr sz="900" b="0">
@@ -5302,7 +5302,7 @@
                 </a:solidFill>
                 <a:latin typeface="Arial"/>
               </a:rPr>
-              <a:t>  pega3</a:t>
+              <a:t>  pega6</a:t>
             </a:r>
           </a:p>
         </p:txBody>
@@ -5341,7 +5341,7 @@
                 </a:solidFill>
                 <a:latin typeface="Arial"/>
               </a:rPr>
-              <a:t>67</a:t>
+              <a:t>161</a:t>
             </a:r>
           </a:p>
         </p:txBody>
@@ -5380,7 +5380,7 @@
                 </a:solidFill>
                 <a:latin typeface="Arial"/>
               </a:rPr>
-              <a:t>71</a:t>
+              <a:t>256</a:t>
             </a:r>
           </a:p>
         </p:txBody>
@@ -5415,11 +5415,11 @@
             <a:r>
               <a:rPr sz="1400" b="1">
                 <a:solidFill>
-                  <a:srgbClr val="B56B00"/>
-                </a:solidFill>
-                <a:latin typeface="Arial"/>
-              </a:rPr>
-              <a:t>76.7%</a:t>
+                  <a:srgbClr val="B3281E"/>
+                </a:solidFill>
+                <a:latin typeface="Arial"/>
+              </a:rPr>
+              <a:t>48.4%</a:t>
             </a:r>
           </a:p>
         </p:txBody>
@@ -5458,7 +5458,7 @@
                 </a:solidFill>
                 <a:latin typeface="Arial"/>
               </a:rPr>
-              <a:t>76.1%</a:t>
+              <a:t>56.5%</a:t>
             </a:r>
           </a:p>
         </p:txBody>
@@ -5497,7 +5497,7 @@
                 </a:solidFill>
                 <a:latin typeface="Arial"/>
               </a:rPr>
-              <a:t>6.0%</a:t>
+              <a:t>13.0%</a:t>
             </a:r>
           </a:p>
           <a:p>
@@ -5513,7 +5513,7 @@
                 </a:solidFill>
                 <a:latin typeface="Arial"/>
               </a:rPr>
-              <a:t>4 of 67 units re-run</a:t>
+              <a:t>21 of 161 units re-run</a:t>
             </a:r>
           </a:p>
         </p:txBody>
@@ -5552,7 +5552,7 @@
                 </a:solidFill>
                 <a:latin typeface="Courier New"/>
               </a:rPr>
-              <a:t>SohuPowerVirusTestCase</a:t>
+              <a:t>validate_coldplate_temperature</a:t>
             </a:r>
           </a:p>
         </p:txBody>
@@ -5591,7 +5591,7 @@
                 </a:solidFill>
                 <a:latin typeface="Arial"/>
               </a:rPr>
-              <a:t>HTT</a:t>
+              <a:t>MLT</a:t>
             </a:r>
             <a:r>
               <a:rPr sz="900" b="0">
@@ -5639,7 +5639,7 @@
                 </a:solidFill>
                 <a:latin typeface="Arial"/>
               </a:rPr>
-              <a:t>67</a:t>
+              <a:t>350</a:t>
             </a:r>
           </a:p>
         </p:txBody>
@@ -5678,7 +5678,7 @@
                 </a:solidFill>
                 <a:latin typeface="Arial"/>
               </a:rPr>
-              <a:t>67</a:t>
+              <a:t>385</a:t>
             </a:r>
           </a:p>
         </p:txBody>
@@ -5717,7 +5717,7 @@
                 </a:solidFill>
                 <a:latin typeface="Arial"/>
               </a:rPr>
-              <a:t>82.4%</a:t>
+              <a:t>71.2%</a:t>
             </a:r>
           </a:p>
         </p:txBody>
@@ -5756,7 +5756,7 @@
                 </a:solidFill>
                 <a:latin typeface="Arial"/>
               </a:rPr>
-              <a:t>70.1%</a:t>
+              <a:t>74.3%</a:t>
             </a:r>
           </a:p>
         </p:txBody>
@@ -5795,7 +5795,7 @@
                 </a:solidFill>
                 <a:latin typeface="Arial"/>
               </a:rPr>
-              <a:t>0.0%</a:t>
+              <a:t>4.3%</a:t>
             </a:r>
           </a:p>
           <a:p>
@@ -5811,7 +5811,7 @@
                 </a:solidFill>
                 <a:latin typeface="Arial"/>
               </a:rPr>
-              <a:t>0 of 67 units re-run</a:t>
+              <a:t>15 of 350 units re-run</a:t>
             </a:r>
           </a:p>
         </p:txBody>
@@ -5850,7 +5850,7 @@
                 </a:solidFill>
                 <a:latin typeface="Courier New"/>
               </a:rPr>
-              <a:t>SohuLlamaForwardIteratedTestCase</a:t>
+              <a:t>C2cLinkupTestCase</a:t>
             </a:r>
           </a:p>
         </p:txBody>
@@ -5885,11 +5885,11 @@
             <a:r>
               <a:rPr sz="1300" b="1">
                 <a:solidFill>
-                  <a:srgbClr val="6B6B6B"/>
-                </a:solidFill>
-                <a:latin typeface="Arial"/>
-              </a:rPr>
-              <a:t>L10 FAT</a:t>
+                  <a:srgbClr val="141414"/>
+                </a:solidFill>
+                <a:latin typeface="Arial"/>
+              </a:rPr>
+              <a:t>HTT</a:t>
             </a:r>
             <a:r>
               <a:rPr sz="900" b="0">
@@ -5898,7 +5898,7 @@
                 </a:solidFill>
                 <a:latin typeface="Arial"/>
               </a:rPr>
-              <a:t>  pega4</a:t>
+              <a:t>  pega3</a:t>
             </a:r>
           </a:p>
         </p:txBody>
@@ -5933,11 +5933,11 @@
             <a:r>
               <a:rPr sz="1250" b="0">
                 <a:solidFill>
-                  <a:srgbClr val="6B6B6B"/>
-                </a:solidFill>
-                <a:latin typeface="Arial"/>
-              </a:rPr>
-              <a:t>2</a:t>
+                  <a:srgbClr val="141414"/>
+                </a:solidFill>
+                <a:latin typeface="Arial"/>
+              </a:rPr>
+              <a:t>265</a:t>
             </a:r>
           </a:p>
         </p:txBody>
@@ -5972,11 +5972,11 @@
             <a:r>
               <a:rPr sz="1250" b="0">
                 <a:solidFill>
-                  <a:srgbClr val="6B6B6B"/>
-                </a:solidFill>
-                <a:latin typeface="Arial"/>
-              </a:rPr>
-              <a:t>8</a:t>
+                  <a:srgbClr val="141414"/>
+                </a:solidFill>
+                <a:latin typeface="Arial"/>
+              </a:rPr>
+              <a:t>271</a:t>
             </a:r>
           </a:p>
         </p:txBody>
@@ -6009,13 +6009,13 @@
               </a:spcAft>
             </a:pPr>
             <a:r>
-              <a:rPr sz="1000" b="0">
-                <a:solidFill>
-                  <a:srgbClr val="6B6B6B"/>
-                </a:solidFill>
-                <a:latin typeface="Arial"/>
-              </a:rPr>
-              <a:t>quantity only</a:t>
+              <a:rPr sz="1400" b="1">
+                <a:solidFill>
+                  <a:srgbClr val="B56B00"/>
+                </a:solidFill>
+                <a:latin typeface="Arial"/>
+              </a:rPr>
+              <a:t>77.1%</a:t>
             </a:r>
           </a:p>
         </p:txBody>
@@ -6050,11 +6050,11 @@
             <a:r>
               <a:rPr sz="1250" b="0">
                 <a:solidFill>
-                  <a:srgbClr val="6B6B6B"/>
-                </a:solidFill>
-                <a:latin typeface="Arial"/>
-              </a:rPr>
-              <a:t>—</a:t>
+                  <a:srgbClr val="141414"/>
+                </a:solidFill>
+                <a:latin typeface="Arial"/>
+              </a:rPr>
+              <a:t>74.3%</a:t>
             </a:r>
           </a:p>
         </p:txBody>
@@ -6093,7 +6093,7 @@
                 </a:solidFill>
                 <a:latin typeface="Arial"/>
               </a:rPr>
-              <a:t>—</a:t>
+              <a:t>2.3%</a:t>
             </a:r>
           </a:p>
           <a:p>
@@ -6109,7 +6109,7 @@
                 </a:solidFill>
                 <a:latin typeface="Arial"/>
               </a:rPr>
-              <a:t>chassis and rack level, in bring-up — quantity only</a:t>
+              <a:t>6 of 265 units re-run</a:t>
             </a:r>
           </a:p>
         </p:txBody>
@@ -6148,7 +6148,7 @@
                 </a:solidFill>
                 <a:latin typeface="Courier New"/>
               </a:rPr>
-              <a:t>SohuHostRebootTestCase</a:t>
+              <a:t>SohuLlamaForwardIteratedTestCase</a:t>
             </a:r>
           </a:p>
         </p:txBody>
@@ -6187,7 +6187,7 @@
                 </a:solidFill>
                 <a:latin typeface="Arial"/>
               </a:rPr>
-              <a:t>L10 SFT</a:t>
+              <a:t>L10 FAT</a:t>
             </a:r>
             <a:r>
               <a:rPr sz="900" b="0">
@@ -6235,7 +6235,7 @@
                 </a:solidFill>
                 <a:latin typeface="Arial"/>
               </a:rPr>
-              <a:t>2</a:t>
+              <a:t>16</a:t>
             </a:r>
           </a:p>
         </p:txBody>
@@ -6274,7 +6274,7 @@
                 </a:solidFill>
                 <a:latin typeface="Arial"/>
               </a:rPr>
-              <a:t>8</a:t>
+              <a:t>114</a:t>
             </a:r>
           </a:p>
         </p:txBody>
@@ -6446,7 +6446,7 @@
                 </a:solidFill>
                 <a:latin typeface="Courier New"/>
               </a:rPr>
-              <a:t>SohuPowerVirusMultiChipTestCase</a:t>
+              <a:t>SohuHostRebootTestCase</a:t>
             </a:r>
           </a:p>
         </p:txBody>
@@ -6485,7 +6485,7 @@
                 </a:solidFill>
                 <a:latin typeface="Arial"/>
               </a:rPr>
-              <a:t>L10 RIN</a:t>
+              <a:t>L10 SFT</a:t>
             </a:r>
             <a:r>
               <a:rPr sz="900" b="0">
@@ -6533,7 +6533,7 @@
                 </a:solidFill>
                 <a:latin typeface="Arial"/>
               </a:rPr>
-              <a:t>2</a:t>
+              <a:t>14</a:t>
             </a:r>
           </a:p>
         </p:txBody>
@@ -6572,7 +6572,7 @@
                 </a:solidFill>
                 <a:latin typeface="Arial"/>
               </a:rPr>
-              <a:t>2</a:t>
+              <a:t>35</a:t>
             </a:r>
           </a:p>
         </p:txBody>
@@ -6744,7 +6744,7 @@
                 </a:solidFill>
                 <a:latin typeface="Courier New"/>
               </a:rPr>
-              <a:t>—</a:t>
+              <a:t>SohuPowerVirusMultiChipTestCase</a:t>
             </a:r>
           </a:p>
         </p:txBody>
@@ -6783,7 +6783,7 @@
                 </a:solidFill>
                 <a:latin typeface="Arial"/>
               </a:rPr>
-              <a:t>L10 2U</a:t>
+              <a:t>L10 RIN</a:t>
             </a:r>
             <a:r>
               <a:rPr sz="900" b="0">
@@ -6831,7 +6831,7 @@
                 </a:solidFill>
                 <a:latin typeface="Arial"/>
               </a:rPr>
-              <a:t>2</a:t>
+              <a:t>5</a:t>
             </a:r>
           </a:p>
         </p:txBody>
@@ -6870,7 +6870,7 @@
                 </a:solidFill>
                 <a:latin typeface="Arial"/>
               </a:rPr>
-              <a:t>10</a:t>
+              <a:t>8</a:t>
             </a:r>
           </a:p>
         </p:txBody>
@@ -7042,7 +7042,7 @@
                 </a:solidFill>
                 <a:latin typeface="Courier New"/>
               </a:rPr>
-              <a:t>CheckKernelVersion</a:t>
+              <a:t>RunInStress</a:t>
             </a:r>
           </a:p>
         </p:txBody>
@@ -7081,7 +7081,7 @@
                 </a:solidFill>
                 <a:latin typeface="Arial"/>
               </a:rPr>
-              <a:t>L11 Provision</a:t>
+              <a:t>L10 2U</a:t>
             </a:r>
             <a:r>
               <a:rPr sz="900" b="0">
@@ -7090,7 +7090,7 @@
                 </a:solidFill>
                 <a:latin typeface="Arial"/>
               </a:rPr>
-              <a:t>  pega5</a:t>
+              <a:t>  pega4</a:t>
             </a:r>
           </a:p>
         </p:txBody>
@@ -7129,7 +7129,7 @@
                 </a:solidFill>
                 <a:latin typeface="Arial"/>
               </a:rPr>
-              <a:t>1</a:t>
+              <a:t>2</a:t>
             </a:r>
           </a:p>
         </p:txBody>
@@ -7168,7 +7168,7 @@
                 </a:solidFill>
                 <a:latin typeface="Arial"/>
               </a:rPr>
-              <a:t>3</a:t>
+              <a:t>10</a:t>
             </a:r>
           </a:p>
         </p:txBody>
@@ -7340,6 +7340,304 @@
                 </a:solidFill>
                 <a:latin typeface="Courier New"/>
               </a:rPr>
+              <a:t>CheckKernelVersion</a:t>
+            </a:r>
+          </a:p>
+        </p:txBody>
+      </p:sp>
+      <p:sp>
+        <p:nvSpPr>
+          <p:cNvPr id="66" name="TextBox 65"/>
+          <p:cNvSpPr txBox="1"/>
+          <p:nvPr/>
+        </p:nvSpPr>
+        <p:spPr>
+          <a:xfrm>
+            <a:off x="502920" y="5897880"/>
+            <a:ext cx="2194560" cy="365760"/>
+          </a:xfrm>
+          <a:prstGeom prst="rect">
+            <a:avLst/>
+          </a:prstGeom>
+          <a:noFill/>
+        </p:spPr>
+        <p:txBody>
+          <a:bodyPr wrap="square" lIns="0" rIns="0" tIns="0" bIns="0">
+            <a:spAutoFit/>
+          </a:bodyPr>
+          <a:lstStyle/>
+          <a:p>
+            <a:pPr algn="l">
+              <a:spcAft>
+                <a:spcPts val="300"/>
+              </a:spcAft>
+            </a:pPr>
+            <a:r>
+              <a:rPr sz="1300" b="1">
+                <a:solidFill>
+                  <a:srgbClr val="6B6B6B"/>
+                </a:solidFill>
+                <a:latin typeface="Arial"/>
+              </a:rPr>
+              <a:t>L11 Provision</a:t>
+            </a:r>
+            <a:r>
+              <a:rPr sz="900" b="0">
+                <a:solidFill>
+                  <a:srgbClr val="6B6B6B"/>
+                </a:solidFill>
+                <a:latin typeface="Arial"/>
+              </a:rPr>
+              <a:t>  pega5</a:t>
+            </a:r>
+          </a:p>
+        </p:txBody>
+      </p:sp>
+      <p:sp>
+        <p:nvSpPr>
+          <p:cNvPr id="67" name="TextBox 66"/>
+          <p:cNvSpPr txBox="1"/>
+          <p:nvPr/>
+        </p:nvSpPr>
+        <p:spPr>
+          <a:xfrm>
+            <a:off x="2788920" y="5897880"/>
+            <a:ext cx="914400" cy="274320"/>
+          </a:xfrm>
+          <a:prstGeom prst="rect">
+            <a:avLst/>
+          </a:prstGeom>
+          <a:noFill/>
+        </p:spPr>
+        <p:txBody>
+          <a:bodyPr wrap="square" lIns="0" rIns="0" tIns="0" bIns="0">
+            <a:spAutoFit/>
+          </a:bodyPr>
+          <a:lstStyle/>
+          <a:p>
+            <a:pPr algn="l">
+              <a:spcAft>
+                <a:spcPts val="300"/>
+              </a:spcAft>
+            </a:pPr>
+            <a:r>
+              <a:rPr sz="1250" b="0">
+                <a:solidFill>
+                  <a:srgbClr val="6B6B6B"/>
+                </a:solidFill>
+                <a:latin typeface="Arial"/>
+              </a:rPr>
+              <a:t>1</a:t>
+            </a:r>
+          </a:p>
+        </p:txBody>
+      </p:sp>
+      <p:sp>
+        <p:nvSpPr>
+          <p:cNvPr id="68" name="TextBox 67"/>
+          <p:cNvSpPr txBox="1"/>
+          <p:nvPr/>
+        </p:nvSpPr>
+        <p:spPr>
+          <a:xfrm>
+            <a:off x="3794760" y="5897880"/>
+            <a:ext cx="1005840" cy="274320"/>
+          </a:xfrm>
+          <a:prstGeom prst="rect">
+            <a:avLst/>
+          </a:prstGeom>
+          <a:noFill/>
+        </p:spPr>
+        <p:txBody>
+          <a:bodyPr wrap="square" lIns="0" rIns="0" tIns="0" bIns="0">
+            <a:spAutoFit/>
+          </a:bodyPr>
+          <a:lstStyle/>
+          <a:p>
+            <a:pPr algn="l">
+              <a:spcAft>
+                <a:spcPts val="300"/>
+              </a:spcAft>
+            </a:pPr>
+            <a:r>
+              <a:rPr sz="1250" b="0">
+                <a:solidFill>
+                  <a:srgbClr val="6B6B6B"/>
+                </a:solidFill>
+                <a:latin typeface="Arial"/>
+              </a:rPr>
+              <a:t>13</a:t>
+            </a:r>
+          </a:p>
+        </p:txBody>
+      </p:sp>
+      <p:sp>
+        <p:nvSpPr>
+          <p:cNvPr id="69" name="TextBox 68"/>
+          <p:cNvSpPr txBox="1"/>
+          <p:nvPr/>
+        </p:nvSpPr>
+        <p:spPr>
+          <a:xfrm>
+            <a:off x="4892040" y="5897880"/>
+            <a:ext cx="1371600" cy="274320"/>
+          </a:xfrm>
+          <a:prstGeom prst="rect">
+            <a:avLst/>
+          </a:prstGeom>
+          <a:noFill/>
+        </p:spPr>
+        <p:txBody>
+          <a:bodyPr wrap="square" lIns="0" rIns="0" tIns="0" bIns="0">
+            <a:spAutoFit/>
+          </a:bodyPr>
+          <a:lstStyle/>
+          <a:p>
+            <a:pPr algn="l">
+              <a:spcAft>
+                <a:spcPts val="300"/>
+              </a:spcAft>
+            </a:pPr>
+            <a:r>
+              <a:rPr sz="1000" b="0">
+                <a:solidFill>
+                  <a:srgbClr val="6B6B6B"/>
+                </a:solidFill>
+                <a:latin typeface="Arial"/>
+              </a:rPr>
+              <a:t>quantity only</a:t>
+            </a:r>
+          </a:p>
+        </p:txBody>
+      </p:sp>
+      <p:sp>
+        <p:nvSpPr>
+          <p:cNvPr id="70" name="TextBox 69"/>
+          <p:cNvSpPr txBox="1"/>
+          <p:nvPr/>
+        </p:nvSpPr>
+        <p:spPr>
+          <a:xfrm>
+            <a:off x="6400800" y="5897880"/>
+            <a:ext cx="1463040" cy="274320"/>
+          </a:xfrm>
+          <a:prstGeom prst="rect">
+            <a:avLst/>
+          </a:prstGeom>
+          <a:noFill/>
+        </p:spPr>
+        <p:txBody>
+          <a:bodyPr wrap="square" lIns="0" rIns="0" tIns="0" bIns="0">
+            <a:spAutoFit/>
+          </a:bodyPr>
+          <a:lstStyle/>
+          <a:p>
+            <a:pPr algn="l">
+              <a:spcAft>
+                <a:spcPts val="300"/>
+              </a:spcAft>
+            </a:pPr>
+            <a:r>
+              <a:rPr sz="1250" b="0">
+                <a:solidFill>
+                  <a:srgbClr val="6B6B6B"/>
+                </a:solidFill>
+                <a:latin typeface="Arial"/>
+              </a:rPr>
+              <a:t>—</a:t>
+            </a:r>
+          </a:p>
+        </p:txBody>
+      </p:sp>
+      <p:sp>
+        <p:nvSpPr>
+          <p:cNvPr id="71" name="TextBox 70"/>
+          <p:cNvSpPr txBox="1"/>
+          <p:nvPr/>
+        </p:nvSpPr>
+        <p:spPr>
+          <a:xfrm>
+            <a:off x="8001000" y="5897880"/>
+            <a:ext cx="1691640" cy="402336"/>
+          </a:xfrm>
+          <a:prstGeom prst="rect">
+            <a:avLst/>
+          </a:prstGeom>
+          <a:noFill/>
+        </p:spPr>
+        <p:txBody>
+          <a:bodyPr wrap="square" lIns="0" rIns="0" tIns="0" bIns="0">
+            <a:spAutoFit/>
+          </a:bodyPr>
+          <a:lstStyle/>
+          <a:p>
+            <a:pPr algn="l">
+              <a:spcAft>
+                <a:spcPts val="0"/>
+              </a:spcAft>
+            </a:pPr>
+            <a:r>
+              <a:rPr sz="1400" b="1">
+                <a:solidFill>
+                  <a:srgbClr val="141414"/>
+                </a:solidFill>
+                <a:latin typeface="Arial"/>
+              </a:rPr>
+              <a:t>—</a:t>
+            </a:r>
+          </a:p>
+          <a:p>
+            <a:pPr algn="l">
+              <a:spcAft>
+                <a:spcPts val="0"/>
+              </a:spcAft>
+            </a:pPr>
+            <a:r>
+              <a:rPr sz="850" b="0">
+                <a:solidFill>
+                  <a:srgbClr val="6B6B6B"/>
+                </a:solidFill>
+                <a:latin typeface="Arial"/>
+              </a:rPr>
+              <a:t>chassis and rack level, in bring-up — quantity only</a:t>
+            </a:r>
+          </a:p>
+        </p:txBody>
+      </p:sp>
+      <p:sp>
+        <p:nvSpPr>
+          <p:cNvPr id="72" name="TextBox 71"/>
+          <p:cNvSpPr txBox="1"/>
+          <p:nvPr/>
+        </p:nvSpPr>
+        <p:spPr>
+          <a:xfrm>
+            <a:off x="9784080" y="5897880"/>
+            <a:ext cx="1920240" cy="402336"/>
+          </a:xfrm>
+          <a:prstGeom prst="rect">
+            <a:avLst/>
+          </a:prstGeom>
+          <a:noFill/>
+        </p:spPr>
+        <p:txBody>
+          <a:bodyPr wrap="square" lIns="0" rIns="0" tIns="0" bIns="0">
+            <a:spAutoFit/>
+          </a:bodyPr>
+          <a:lstStyle/>
+          <a:p>
+            <a:pPr algn="l">
+              <a:spcAft>
+                <a:spcPts val="300"/>
+              </a:spcAft>
+            </a:pPr>
+            <a:r>
+              <a:rPr sz="850" b="0">
+                <a:solidFill>
+                  <a:srgbClr val="6B6B6B"/>
+                </a:solidFill>
+                <a:latin typeface="Courier New"/>
+              </a:rPr>
               <a:t>ProvisionPdu</a:t>
             </a:r>
           </a:p>
@@ -7347,7 +7645,7 @@
       </p:sp>
       <p:sp>
         <p:nvSpPr>
-          <p:cNvPr id="66" name="TextBox 65"/>
+          <p:cNvPr id="73" name="TextBox 72"/>
           <p:cNvSpPr txBox="1"/>
           <p:nvPr/>
         </p:nvSpPr>
@@ -7379,7 +7677,7 @@
                 </a:solidFill>
                 <a:latin typeface="Arial"/>
               </a:rPr>
-              <a:t>Rolled first-pass across MLT × HTT: </a:t>
+              <a:t>Rolled first-pass across TIM × MLT × HTT: </a:t>
             </a:r>
             <a:r>
               <a:rPr sz="1400" b="1">
@@ -7388,7 +7686,7 @@
                 </a:solidFill>
                 <a:latin typeface="Arial"/>
               </a:rPr>
-              <a:t>63.2%</a:t>
+              <a:t>26.6%</a:t>
             </a:r>
           </a:p>
           <a:p>
@@ -7760,7 +8058,7 @@
                 </a:solidFill>
                 <a:latin typeface="Arial"/>
               </a:rPr>
-              <a:t>today 76.7% at MLT, 82.4% at HTT</a:t>
+              <a:t>today 71.2% at MLT, 77.1% at HTT</a:t>
             </a:r>
           </a:p>
         </p:txBody>
@@ -7877,7 +8175,7 @@
                 </a:solidFill>
                 <a:latin typeface="Arial"/>
               </a:rPr>
-              <a:t>today 6.0% at MLT, 0.0% at HTT</a:t>
+              <a:t>today 4.3% at MLT, 2.3% at HTT</a:t>
             </a:r>
           </a:p>
         </p:txBody>
@@ -8297,7 +8595,7 @@
                 </a:solidFill>
                 <a:latin typeface="Arial"/>
               </a:rPr>
-              <a:t>today 8 units across four steps</a:t>
+              <a:t>today 37 units across four steps</a:t>
             </a:r>
           </a:p>
         </p:txBody>

--- a/decks/weekly-2026-W34.pptx
+++ b/decks/weekly-2026-W34.pptx
@@ -3436,7 +3436,7 @@
                 </a:solidFill>
                 <a:latin typeface="Arial"/>
               </a:rPr>
-              <a:t>First pass 71.2% at MLT and 77.1% at HTT — 26.6% rolled across the two.</a:t>
+              <a:t>First pass 71.2% at MLT and 77.1% at HTT — 54.9% rolled across the two.</a:t>
             </a:r>
           </a:p>
           <a:p>
@@ -4406,7 +4406,7 @@
                 </a:solidFill>
                 <a:latin typeface="Arial"/>
               </a:rPr>
-              <a:t>26.6%</a:t>
+              <a:t>54.9%</a:t>
             </a:r>
           </a:p>
           <a:p>
@@ -7677,7 +7677,7 @@
                 </a:solidFill>
                 <a:latin typeface="Arial"/>
               </a:rPr>
-              <a:t>Rolled first-pass across TIM × MLT × HTT: </a:t>
+              <a:t>Rolled first-pass across MLT × HTT: </a:t>
             </a:r>
             <a:r>
               <a:rPr sz="1400" b="1">
@@ -7686,7 +7686,7 @@
                 </a:solidFill>
                 <a:latin typeface="Arial"/>
               </a:rPr>
-              <a:t>26.6%</a:t>
+              <a:t>54.9%</a:t>
             </a:r>
           </a:p>
           <a:p>

--- a/decks/weekly-2026-W34.pptx
+++ b/decks/weekly-2026-W34.pptx
@@ -3303,7 +3303,7 @@
                 </a:solidFill>
                 <a:latin typeface="Arial"/>
               </a:rPr>
-              <a:t>814 units through 8 steps this week, across 1092 runs.</a:t>
+              <a:t>815 units through 8 steps this week, across 1102 runs.</a:t>
             </a:r>
           </a:p>
           <a:p>
@@ -4183,7 +4183,7 @@
                 </a:solidFill>
                 <a:latin typeface="Arial"/>
               </a:rPr>
-              <a:t>FAT 16u · SFT 14u</a:t>
+              <a:t>FAT 16u · SFT 15u</a:t>
             </a:r>
             <a:r>
               <a:rPr sz="800" b="0">
@@ -4192,7 +4192,7 @@
                 </a:solidFill>
                 <a:latin typeface="Arial"/>
               </a:rPr>
-              <a:t>  quantity only</a:t>
+              <a:t>  few units</a:t>
             </a:r>
           </a:p>
         </p:txBody>
@@ -4248,7 +4248,7 @@
                 </a:solidFill>
                 <a:latin typeface="Arial"/>
               </a:rPr>
-              <a:t>  quantity only</a:t>
+              <a:t>  few units</a:t>
             </a:r>
           </a:p>
         </p:txBody>
@@ -4304,7 +4304,7 @@
                 </a:solidFill>
                 <a:latin typeface="Arial"/>
               </a:rPr>
-              <a:t>  quantity only</a:t>
+              <a:t>  few units</a:t>
             </a:r>
           </a:p>
         </p:txBody>
@@ -4493,7 +4493,7 @@
                 </a:solidFill>
                 <a:latin typeface="Arial"/>
               </a:rPr>
-              <a:t>814 units</a:t>
+              <a:t>815 units</a:t>
             </a:r>
           </a:p>
           <a:p>
@@ -4509,7 +4509,7 @@
                 </a:solidFill>
                 <a:latin typeface="Arial"/>
               </a:rPr>
-              <a:t>1092 runs across 8 steps</a:t>
+              <a:t>1102 runs across 8 steps</a:t>
             </a:r>
           </a:p>
         </p:txBody>
@@ -4580,7 +4580,7 @@
                 </a:solidFill>
                 <a:latin typeface="Arial"/>
               </a:rPr>
-              <a:t>A count means no yield is reported. L10 FAT, L10 SFT, L10 RIN, L10 2U, L11 Provision are chassis and rack level and in bring-up — a percentage over three units swings 33 points on one of them.</a:t>
+              <a:t>A count means no yield is reported. None are chassis and rack level and in bring-up — a percentage over three units swings 33 points on one of them.</a:t>
             </a:r>
           </a:p>
           <a:p>
@@ -4596,7 +4596,7 @@
                 </a:solidFill>
                 <a:latin typeface="Arial"/>
               </a:rPr>
-              <a:t>WST and FT are reported by Sigurd. VBB is drawn for the flow and left out of the yield view.</a:t>
+              <a:t>Too few units this week: L10 FAT, L10 SFT, L10 RIN, L10 2U, L11 Provision. WST and FT are reported by Sigurd. VBB is drawn for the flow and left out of the yield view.</a:t>
             </a:r>
           </a:p>
           <a:p>
@@ -6313,7 +6313,7 @@
                 </a:solidFill>
                 <a:latin typeface="Arial"/>
               </a:rPr>
-              <a:t>quantity only</a:t>
+              <a:t>not enough units</a:t>
             </a:r>
           </a:p>
         </p:txBody>
@@ -6352,7 +6352,7 @@
                 </a:solidFill>
                 <a:latin typeface="Arial"/>
               </a:rPr>
-              <a:t>—</a:t>
+              <a:t>50.0%</a:t>
             </a:r>
           </a:p>
         </p:txBody>
@@ -6387,11 +6387,11 @@
             <a:r>
               <a:rPr sz="1400" b="1">
                 <a:solidFill>
-                  <a:srgbClr val="141414"/>
-                </a:solidFill>
-                <a:latin typeface="Arial"/>
-              </a:rPr>
-              <a:t>—</a:t>
+                  <a:srgbClr val="B3281E"/>
+                </a:solidFill>
+                <a:latin typeface="Arial"/>
+              </a:rPr>
+              <a:t>93.8%</a:t>
             </a:r>
           </a:p>
           <a:p>
@@ -6407,7 +6407,7 @@
                 </a:solidFill>
                 <a:latin typeface="Arial"/>
               </a:rPr>
-              <a:t>chassis and rack level, in bring-up — quantity only</a:t>
+              <a:t>15 of 16 units re-run</a:t>
             </a:r>
           </a:p>
         </p:txBody>
@@ -6533,7 +6533,7 @@
                 </a:solidFill>
                 <a:latin typeface="Arial"/>
               </a:rPr>
-              <a:t>14</a:t>
+              <a:t>15</a:t>
             </a:r>
           </a:p>
         </p:txBody>
@@ -6572,7 +6572,7 @@
                 </a:solidFill>
                 <a:latin typeface="Arial"/>
               </a:rPr>
-              <a:t>35</a:t>
+              <a:t>37</a:t>
             </a:r>
           </a:p>
         </p:txBody>
@@ -6611,7 +6611,7 @@
                 </a:solidFill>
                 <a:latin typeface="Arial"/>
               </a:rPr>
-              <a:t>quantity only</a:t>
+              <a:t>not enough units</a:t>
             </a:r>
           </a:p>
         </p:txBody>
@@ -6650,7 +6650,7 @@
                 </a:solidFill>
                 <a:latin typeface="Arial"/>
               </a:rPr>
-              <a:t>—</a:t>
+              <a:t>13.3%</a:t>
             </a:r>
           </a:p>
         </p:txBody>
@@ -6685,11 +6685,11 @@
             <a:r>
               <a:rPr sz="1400" b="1">
                 <a:solidFill>
-                  <a:srgbClr val="141414"/>
-                </a:solidFill>
-                <a:latin typeface="Arial"/>
-              </a:rPr>
-              <a:t>—</a:t>
+                  <a:srgbClr val="B3281E"/>
+                </a:solidFill>
+                <a:latin typeface="Arial"/>
+              </a:rPr>
+              <a:t>60.0%</a:t>
             </a:r>
           </a:p>
           <a:p>
@@ -6705,7 +6705,7 @@
                 </a:solidFill>
                 <a:latin typeface="Arial"/>
               </a:rPr>
-              <a:t>chassis and rack level, in bring-up — quantity only</a:t>
+              <a:t>9 of 15 units re-run</a:t>
             </a:r>
           </a:p>
         </p:txBody>
@@ -6870,7 +6870,7 @@
                 </a:solidFill>
                 <a:latin typeface="Arial"/>
               </a:rPr>
-              <a:t>8</a:t>
+              <a:t>11</a:t>
             </a:r>
           </a:p>
         </p:txBody>
@@ -6909,7 +6909,7 @@
                 </a:solidFill>
                 <a:latin typeface="Arial"/>
               </a:rPr>
-              <a:t>quantity only</a:t>
+              <a:t>not enough units</a:t>
             </a:r>
           </a:p>
         </p:txBody>
@@ -6948,7 +6948,7 @@
                 </a:solidFill>
                 <a:latin typeface="Arial"/>
               </a:rPr>
-              <a:t>—</a:t>
+              <a:t>40.0%</a:t>
             </a:r>
           </a:p>
         </p:txBody>
@@ -6983,11 +6983,11 @@
             <a:r>
               <a:rPr sz="1400" b="1">
                 <a:solidFill>
-                  <a:srgbClr val="141414"/>
-                </a:solidFill>
-                <a:latin typeface="Arial"/>
-              </a:rPr>
-              <a:t>—</a:t>
+                  <a:srgbClr val="B3281E"/>
+                </a:solidFill>
+                <a:latin typeface="Arial"/>
+              </a:rPr>
+              <a:t>60.0%</a:t>
             </a:r>
           </a:p>
           <a:p>
@@ -7003,7 +7003,7 @@
                 </a:solidFill>
                 <a:latin typeface="Arial"/>
               </a:rPr>
-              <a:t>chassis and rack level, in bring-up — quantity only</a:t>
+              <a:t>3 of 5 units re-run</a:t>
             </a:r>
           </a:p>
         </p:txBody>
@@ -7207,7 +7207,7 @@
                 </a:solidFill>
                 <a:latin typeface="Arial"/>
               </a:rPr>
-              <a:t>quantity only</a:t>
+              <a:t>not enough units</a:t>
             </a:r>
           </a:p>
         </p:txBody>
@@ -7246,7 +7246,7 @@
                 </a:solidFill>
                 <a:latin typeface="Arial"/>
               </a:rPr>
-              <a:t>—</a:t>
+              <a:t>0.0%</a:t>
             </a:r>
           </a:p>
         </p:txBody>
@@ -7281,11 +7281,11 @@
             <a:r>
               <a:rPr sz="1400" b="1">
                 <a:solidFill>
-                  <a:srgbClr val="141414"/>
-                </a:solidFill>
-                <a:latin typeface="Arial"/>
-              </a:rPr>
-              <a:t>—</a:t>
+                  <a:srgbClr val="B3281E"/>
+                </a:solidFill>
+                <a:latin typeface="Arial"/>
+              </a:rPr>
+              <a:t>100.0%</a:t>
             </a:r>
           </a:p>
           <a:p>
@@ -7301,7 +7301,7 @@
                 </a:solidFill>
                 <a:latin typeface="Arial"/>
               </a:rPr>
-              <a:t>chassis and rack level, in bring-up — quantity only</a:t>
+              <a:t>2 of 2 units re-run</a:t>
             </a:r>
           </a:p>
         </p:txBody>
@@ -7466,7 +7466,7 @@
                 </a:solidFill>
                 <a:latin typeface="Arial"/>
               </a:rPr>
-              <a:t>13</a:t>
+              <a:t>18</a:t>
             </a:r>
           </a:p>
         </p:txBody>
@@ -7505,7 +7505,7 @@
                 </a:solidFill>
                 <a:latin typeface="Arial"/>
               </a:rPr>
-              <a:t>quantity only</a:t>
+              <a:t>not enough units</a:t>
             </a:r>
           </a:p>
         </p:txBody>
@@ -7544,7 +7544,7 @@
                 </a:solidFill>
                 <a:latin typeface="Arial"/>
               </a:rPr>
-              <a:t>—</a:t>
+              <a:t>100.0%</a:t>
             </a:r>
           </a:p>
         </p:txBody>
@@ -7579,11 +7579,11 @@
             <a:r>
               <a:rPr sz="1400" b="1">
                 <a:solidFill>
-                  <a:srgbClr val="141414"/>
-                </a:solidFill>
-                <a:latin typeface="Arial"/>
-              </a:rPr>
-              <a:t>—</a:t>
+                  <a:srgbClr val="B3281E"/>
+                </a:solidFill>
+                <a:latin typeface="Arial"/>
+              </a:rPr>
+              <a:t>100.0%</a:t>
             </a:r>
           </a:p>
           <a:p>
@@ -7599,7 +7599,7 @@
                 </a:solidFill>
                 <a:latin typeface="Arial"/>
               </a:rPr>
-              <a:t>chassis and rack level, in bring-up — quantity only</a:t>
+              <a:t>1 of 1 units re-run</a:t>
             </a:r>
           </a:p>
         </p:txBody>
@@ -7638,7 +7638,7 @@
                 </a:solidFill>
                 <a:latin typeface="Courier New"/>
               </a:rPr>
-              <a:t>ProvisionPdu</a:t>
+              <a:t>ProvisionComputeServer</a:t>
             </a:r>
           </a:p>
         </p:txBody>
@@ -8595,7 +8595,7 @@
                 </a:solidFill>
                 <a:latin typeface="Arial"/>
               </a:rPr>
-              <a:t>today 37 units across four steps</a:t>
+              <a:t>today 38 units across four steps</a:t>
             </a:r>
           </a:p>
         </p:txBody>
